--- a/classes/parte-1-redes-y-seguridad-de-redes/028-tcpdump-y-captura-de-trafico-en-linea-de-comandos/clase-028-presentacion.pptx
+++ b/classes/parte-1-redes-y-seguridad-de-redes/028-tcpdump-y-captura-de-trafico-en-linea-de-comandos/clase-028-presentacion.pptx
@@ -17,6 +17,9 @@
     <p:sldId id="265" r:id="rId16"/>
     <p:sldId id="266" r:id="rId17"/>
     <p:sldId id="267" r:id="rId18"/>
+    <p:sldId id="268" r:id="rId19"/>
+    <p:sldId id="269" r:id="rId20"/>
+    <p:sldId id="270" r:id="rId21"/>
   </p:sldIdLst>
   <p:sldSz cx="9144000" cy="6858000" type="screen4x3"/>
   <p:notesSz cx="6858000" cy="9144000"/>
@@ -3198,7 +3201,7 @@
                   <a:srgbClr val="0B3D2E"/>
                 </a:solidFill>
               </a:rPr>
-              <a:t>⚠️ Errores comunes</a:t>
+              <a:t>✍️ Ejercicios</a:t>
             </a:r>
           </a:p>
         </p:txBody>
@@ -3236,82 +3239,82 @@
                   <a:srgbClr val="22282E"/>
                 </a:solidFill>
               </a:rPr>
-              <a:t>•  tcpdump: &lt;iface&gt;: You don't have permission — Falta privilegio; usa sudo o asigna capnetraw</a:t>
-            </a:r>
-          </a:p>
-          <a:p>
-            <a:pPr>
-              <a:spcAft>
-                <a:spcPts val="600"/>
-              </a:spcAft>
-            </a:pPr>
-            <a:r>
-              <a:rPr sz="1500">
-                <a:solidFill>
-                  <a:srgbClr val="22282E"/>
-                </a:solidFill>
-              </a:rPr>
-              <a:t>•  La captura por SSH nunca termina o se dispara — No excluiste el puerto 22; añade not port 22</a:t>
-            </a:r>
-          </a:p>
-          <a:p>
-            <a:pPr>
-              <a:spcAft>
-                <a:spcPts val="600"/>
-              </a:spcAft>
-            </a:pPr>
-            <a:r>
-              <a:rPr sz="1500">
-                <a:solidFill>
-                  <a:srgbClr val="22282E"/>
-                </a:solidFill>
-              </a:rPr>
-              <a:t>•  Paquetes truncados en Wireshark — Snap length bajo; captura con -s 0</a:t>
-            </a:r>
-          </a:p>
-          <a:p>
-            <a:pPr>
-              <a:spcAft>
-                <a:spcPts val="600"/>
-              </a:spcAft>
-            </a:pPr>
-            <a:r>
-              <a:rPr sz="1500">
-                <a:solidFill>
-                  <a:srgbClr val="22282E"/>
-                </a:solidFill>
-              </a:rPr>
-              <a:t>•  Filtro no captura nada — Sintaxis BPF incorrecta; prueba el filtro por partes y usa comillas</a:t>
-            </a:r>
-          </a:p>
-          <a:p>
-            <a:pPr>
-              <a:spcAft>
-                <a:spcPts val="600"/>
-              </a:spcAft>
-            </a:pPr>
-            <a:r>
-              <a:rPr sz="1500">
-                <a:solidFill>
-                  <a:srgbClr val="22282E"/>
-                </a:solidFill>
-              </a:rPr>
-              <a:t>•  Disco lleno en captura larga — Sin rotación; usa -C/-W o -G/-W</a:t>
-            </a:r>
-          </a:p>
-          <a:p>
-            <a:pPr>
-              <a:spcAft>
-                <a:spcPts val="600"/>
-              </a:spcAft>
-            </a:pPr>
-            <a:r>
-              <a:rPr sz="1500">
-                <a:solidFill>
-                  <a:srgbClr val="22282E"/>
-                </a:solidFill>
-              </a:rPr>
-              <a:t>•  No resuelve nombres y va lento — Al contrario, -n acelera; si va lento probablemente falta -n y hay DNS inverso</a:t>
+              <a:t>•  Captura solo tráfico ICMP entre dos hosts de tu laboratorio y guárdalo en icmp.pcap.</a:t>
+            </a:r>
+          </a:p>
+          <a:p>
+            <a:pPr>
+              <a:spcAft>
+                <a:spcPts val="600"/>
+              </a:spcAft>
+            </a:pPr>
+            <a:r>
+              <a:rPr sz="1500">
+                <a:solidFill>
+                  <a:srgbClr val="22282E"/>
+                </a:solidFill>
+              </a:rPr>
+              <a:t>•  Escribe un filtro que capture tráfico HTTP y HTTPS (port 80 or port 443).</a:t>
+            </a:r>
+          </a:p>
+          <a:p>
+            <a:pPr>
+              <a:spcAft>
+                <a:spcPts val="600"/>
+              </a:spcAft>
+            </a:pPr>
+            <a:r>
+              <a:rPr sz="1500">
+                <a:solidFill>
+                  <a:srgbClr val="22282E"/>
+                </a:solidFill>
+              </a:rPr>
+              <a:t>•  Captura paquetes con el flag RST activo e interpreta qué conexiones se rechazan.</a:t>
+            </a:r>
+          </a:p>
+          <a:p>
+            <a:pPr>
+              <a:spcAft>
+                <a:spcPts val="600"/>
+              </a:spcAft>
+            </a:pPr>
+            <a:r>
+              <a:rPr sz="1500">
+                <a:solidFill>
+                  <a:srgbClr val="22282E"/>
+                </a:solidFill>
+              </a:rPr>
+              <a:t>•  Usa -c 100 para limitar la captura a 100 paquetes y explica cuándo conviene.</a:t>
+            </a:r>
+          </a:p>
+          <a:p>
+            <a:pPr>
+              <a:spcAft>
+                <a:spcPts val="600"/>
+              </a:spcAft>
+            </a:pPr>
+            <a:r>
+              <a:rPr sz="1500">
+                <a:solidFill>
+                  <a:srgbClr val="22282E"/>
+                </a:solidFill>
+              </a:rPr>
+              <a:t>•  Rota capturas cada 60 segundos con -G 60 y nómbralas con %Y%m%d-%H%M%S.</a:t>
+            </a:r>
+          </a:p>
+          <a:p>
+            <a:pPr>
+              <a:spcAft>
+                <a:spcPts val="600"/>
+              </a:spcAft>
+            </a:pPr>
+            <a:r>
+              <a:rPr sz="1500">
+                <a:solidFill>
+                  <a:srgbClr val="22282E"/>
+                </a:solidFill>
+              </a:rPr>
+              <a:t>•  Convierte tu .pcap a .pcapng con editcap y ábrelo en Wireshark.</a:t>
             </a:r>
           </a:p>
         </p:txBody>
@@ -3362,7 +3365,7 @@
                   <a:srgbClr val="0B3D2E"/>
                 </a:solidFill>
               </a:rPr>
-              <a:t>❓ Preguntas frecuentes</a:t>
+              <a:t>📝 Reto verificable</a:t>
             </a:r>
           </a:p>
         </p:txBody>
@@ -3400,97 +3403,22 @@
                   <a:srgbClr val="22282E"/>
                 </a:solidFill>
               </a:rPr>
-              <a:t>•  ❓ ¿tcpdump o Wireshark?</a:t>
-            </a:r>
-          </a:p>
-          <a:p>
-            <a:pPr>
-              <a:spcAft>
-                <a:spcPts val="600"/>
-              </a:spcAft>
-            </a:pPr>
-            <a:r>
-              <a:rPr sz="1500">
-                <a:solidFill>
-                  <a:srgbClr val="22282E"/>
-                </a:solidFill>
-              </a:rPr>
-              <a:t>•  tcpdump para capturar donde no hay GUI y para filtros rápidos; Wireshark para el análisis profundo. El flujo típico es capturar con tcpdump y disecar en Wireshark.</a:t>
-            </a:r>
-          </a:p>
-          <a:p>
-            <a:pPr>
-              <a:spcAft>
-                <a:spcPts val="600"/>
-              </a:spcAft>
-            </a:pPr>
-            <a:r>
-              <a:rPr sz="1500">
-                <a:solidFill>
-                  <a:srgbClr val="22282E"/>
-                </a:solidFill>
-              </a:rPr>
-              <a:t>•  ❓ ¿Por qué usar -w en vez de leer la salida de texto?</a:t>
-            </a:r>
-          </a:p>
-          <a:p>
-            <a:pPr>
-              <a:spcAft>
-                <a:spcPts val="600"/>
-              </a:spcAft>
-            </a:pPr>
-            <a:r>
-              <a:rPr sz="1500">
-                <a:solidFill>
-                  <a:srgbClr val="22282E"/>
-                </a:solidFill>
-              </a:rPr>
-              <a:t>•  El texto pierde información. -w guarda el paquete íntegro para análisis posterior con cualquier herramienta.</a:t>
-            </a:r>
-          </a:p>
-          <a:p>
-            <a:pPr>
-              <a:spcAft>
-                <a:spcPts val="600"/>
-              </a:spcAft>
-            </a:pPr>
-            <a:r>
-              <a:rPr sz="1500">
-                <a:solidFill>
-                  <a:srgbClr val="22282E"/>
-                </a:solidFill>
-              </a:rPr>
-              <a:t>•  ❓ ¿Los filtros BPF de tcpdump y Wireshark son iguales?</a:t>
-            </a:r>
-          </a:p>
-          <a:p>
-            <a:pPr>
-              <a:spcAft>
-                <a:spcPts val="600"/>
-              </a:spcAft>
-            </a:pPr>
-            <a:r>
-              <a:rPr sz="1500">
-                <a:solidFill>
-                  <a:srgbClr val="22282E"/>
-                </a:solidFill>
-              </a:rPr>
-              <a:t>•  Los filtros de captura de Wireshark sí son BPF (idénticos a tcpdump). Los de visualización de Wireshark son un lenguaje distinto y más rico.</a:t>
-            </a:r>
-          </a:p>
-          <a:p>
-            <a:pPr>
-              <a:spcAft>
-                <a:spcPts val="600"/>
-              </a:spcAft>
-            </a:pPr>
-            <a:r>
-              <a:rPr sz="1500">
-                <a:solidFill>
-                  <a:srgbClr val="22282E"/>
-                </a:solidFill>
-              </a:rPr>
-              <a:t>•  ❓ ¿Cómo capturo sin que la captura afecte el rendimiento del servidor?</a:t>
+              <a:t>•  Desde un servidor de laboratorio (o VM) sin entorno gráfico, captura durante 30 segundos todo el tráfico excepto tu sesión SSH, guárdalo con rotación en archivos de 5 MB, y entrega el primer archivo…</a:t>
+            </a:r>
+          </a:p>
+          <a:p>
+            <a:pPr>
+              <a:spcAft>
+                <a:spcPts val="600"/>
+              </a:spcAft>
+            </a:pPr>
+            <a:r>
+              <a:rPr sz="1500">
+                <a:solidFill>
+                  <a:srgbClr val="22282E"/>
+                </a:solidFill>
+              </a:rPr>
+              <a:t>•  Criterio de aceptación: el archivo abre sin errores en Wireshark, no contiene tráfico del puerto 22 hacia/desde tu IP, y el conteo declarado coincide con el del revisor.</a:t>
             </a:r>
           </a:p>
         </p:txBody>
@@ -3541,7 +3469,7 @@
                   <a:srgbClr val="0B3D2E"/>
                 </a:solidFill>
               </a:rPr>
-              <a:t>🔗 Referencias</a:t>
+              <a:t>⚠️ Errores comunes</a:t>
             </a:r>
           </a:p>
         </p:txBody>
@@ -3579,6 +3507,349 @@
                   <a:srgbClr val="22282E"/>
                 </a:solidFill>
               </a:rPr>
+              <a:t>•  tcpdump: &lt;iface&gt;: You don't have permission — Falta privilegio; usa sudo o asigna capnetraw</a:t>
+            </a:r>
+          </a:p>
+          <a:p>
+            <a:pPr>
+              <a:spcAft>
+                <a:spcPts val="600"/>
+              </a:spcAft>
+            </a:pPr>
+            <a:r>
+              <a:rPr sz="1500">
+                <a:solidFill>
+                  <a:srgbClr val="22282E"/>
+                </a:solidFill>
+              </a:rPr>
+              <a:t>•  La captura por SSH nunca termina o se dispara — No excluiste el puerto 22; añade not port 22</a:t>
+            </a:r>
+          </a:p>
+          <a:p>
+            <a:pPr>
+              <a:spcAft>
+                <a:spcPts val="600"/>
+              </a:spcAft>
+            </a:pPr>
+            <a:r>
+              <a:rPr sz="1500">
+                <a:solidFill>
+                  <a:srgbClr val="22282E"/>
+                </a:solidFill>
+              </a:rPr>
+              <a:t>•  Paquetes truncados en Wireshark — Snap length bajo; captura con -s 0</a:t>
+            </a:r>
+          </a:p>
+          <a:p>
+            <a:pPr>
+              <a:spcAft>
+                <a:spcPts val="600"/>
+              </a:spcAft>
+            </a:pPr>
+            <a:r>
+              <a:rPr sz="1500">
+                <a:solidFill>
+                  <a:srgbClr val="22282E"/>
+                </a:solidFill>
+              </a:rPr>
+              <a:t>•  Filtro no captura nada — Sintaxis BPF incorrecta; prueba el filtro por partes y usa comillas</a:t>
+            </a:r>
+          </a:p>
+          <a:p>
+            <a:pPr>
+              <a:spcAft>
+                <a:spcPts val="600"/>
+              </a:spcAft>
+            </a:pPr>
+            <a:r>
+              <a:rPr sz="1500">
+                <a:solidFill>
+                  <a:srgbClr val="22282E"/>
+                </a:solidFill>
+              </a:rPr>
+              <a:t>•  Disco lleno en captura larga — Sin rotación; usa -C/-W o -G/-W</a:t>
+            </a:r>
+          </a:p>
+          <a:p>
+            <a:pPr>
+              <a:spcAft>
+                <a:spcPts val="600"/>
+              </a:spcAft>
+            </a:pPr>
+            <a:r>
+              <a:rPr sz="1500">
+                <a:solidFill>
+                  <a:srgbClr val="22282E"/>
+                </a:solidFill>
+              </a:rPr>
+              <a:t>•  No resuelve nombres y va lento — Al contrario, -n acelera; si va lento probablemente falta -n y hay DNS inverso</a:t>
+            </a:r>
+          </a:p>
+        </p:txBody>
+      </p:sp>
+    </p:spTree>
+  </p:cSld>
+  <p:clrMapOvr>
+    <a:masterClrMapping/>
+  </p:clrMapOvr>
+</p:sld>
+</file>
+
+<file path=ppt/slides/slide13.xml><?xml version="1.0" encoding="utf-8"?>
+<p:sld xmlns:a="http://schemas.openxmlformats.org/drawingml/2006/main" xmlns:p="http://schemas.openxmlformats.org/presentationml/2006/main" xmlns:r="http://schemas.openxmlformats.org/officeDocument/2006/relationships">
+  <p:cSld>
+    <p:spTree>
+      <p:nvGrpSpPr>
+        <p:cNvPr id="1" name=""/>
+        <p:cNvGrpSpPr/>
+        <p:nvPr/>
+      </p:nvGrpSpPr>
+      <p:grpSpPr/>
+      <p:sp>
+        <p:nvSpPr>
+          <p:cNvPr id="2" name="TextBox 1"/>
+          <p:cNvSpPr txBox="1"/>
+          <p:nvPr/>
+        </p:nvSpPr>
+        <p:spPr>
+          <a:xfrm>
+            <a:off x="457200" y="320040"/>
+            <a:ext cx="8229600" cy="822960"/>
+          </a:xfrm>
+          <a:prstGeom prst="rect">
+            <a:avLst/>
+          </a:prstGeom>
+          <a:noFill/>
+        </p:spPr>
+        <p:txBody>
+          <a:bodyPr wrap="square">
+            <a:spAutoFit/>
+          </a:bodyPr>
+          <a:lstStyle/>
+          <a:p>
+            <a:r>
+              <a:rPr sz="2600" b="1">
+                <a:solidFill>
+                  <a:srgbClr val="0B3D2E"/>
+                </a:solidFill>
+              </a:rPr>
+              <a:t>❓ Preguntas frecuentes</a:t>
+            </a:r>
+          </a:p>
+        </p:txBody>
+      </p:sp>
+      <p:sp>
+        <p:nvSpPr>
+          <p:cNvPr id="3" name="TextBox 2"/>
+          <p:cNvSpPr txBox="1"/>
+          <p:nvPr/>
+        </p:nvSpPr>
+        <p:spPr>
+          <a:xfrm>
+            <a:off x="457200" y="1280160"/>
+            <a:ext cx="8229600" cy="4937760"/>
+          </a:xfrm>
+          <a:prstGeom prst="rect">
+            <a:avLst/>
+          </a:prstGeom>
+          <a:noFill/>
+        </p:spPr>
+        <p:txBody>
+          <a:bodyPr wrap="square">
+            <a:spAutoFit/>
+          </a:bodyPr>
+          <a:lstStyle/>
+          <a:p>
+            <a:pPr>
+              <a:spcAft>
+                <a:spcPts val="600"/>
+              </a:spcAft>
+            </a:pPr>
+            <a:r>
+              <a:rPr sz="1500">
+                <a:solidFill>
+                  <a:srgbClr val="22282E"/>
+                </a:solidFill>
+              </a:rPr>
+              <a:t>•  ❓ ¿tcpdump o Wireshark?</a:t>
+            </a:r>
+          </a:p>
+          <a:p>
+            <a:pPr>
+              <a:spcAft>
+                <a:spcPts val="600"/>
+              </a:spcAft>
+            </a:pPr>
+            <a:r>
+              <a:rPr sz="1500">
+                <a:solidFill>
+                  <a:srgbClr val="22282E"/>
+                </a:solidFill>
+              </a:rPr>
+              <a:t>•  tcpdump para capturar donde no hay GUI y para filtros rápidos; Wireshark para el análisis profundo. El flujo típico es capturar con tcpdump y disecar en Wireshark.</a:t>
+            </a:r>
+          </a:p>
+          <a:p>
+            <a:pPr>
+              <a:spcAft>
+                <a:spcPts val="600"/>
+              </a:spcAft>
+            </a:pPr>
+            <a:r>
+              <a:rPr sz="1500">
+                <a:solidFill>
+                  <a:srgbClr val="22282E"/>
+                </a:solidFill>
+              </a:rPr>
+              <a:t>•  ❓ ¿Por qué usar -w en vez de leer la salida de texto?</a:t>
+            </a:r>
+          </a:p>
+          <a:p>
+            <a:pPr>
+              <a:spcAft>
+                <a:spcPts val="600"/>
+              </a:spcAft>
+            </a:pPr>
+            <a:r>
+              <a:rPr sz="1500">
+                <a:solidFill>
+                  <a:srgbClr val="22282E"/>
+                </a:solidFill>
+              </a:rPr>
+              <a:t>•  El texto pierde información. -w guarda el paquete íntegro para análisis posterior con cualquier herramienta.</a:t>
+            </a:r>
+          </a:p>
+          <a:p>
+            <a:pPr>
+              <a:spcAft>
+                <a:spcPts val="600"/>
+              </a:spcAft>
+            </a:pPr>
+            <a:r>
+              <a:rPr sz="1500">
+                <a:solidFill>
+                  <a:srgbClr val="22282E"/>
+                </a:solidFill>
+              </a:rPr>
+              <a:t>•  ❓ ¿Los filtros BPF de tcpdump y Wireshark son iguales?</a:t>
+            </a:r>
+          </a:p>
+          <a:p>
+            <a:pPr>
+              <a:spcAft>
+                <a:spcPts val="600"/>
+              </a:spcAft>
+            </a:pPr>
+            <a:r>
+              <a:rPr sz="1500">
+                <a:solidFill>
+                  <a:srgbClr val="22282E"/>
+                </a:solidFill>
+              </a:rPr>
+              <a:t>•  Los filtros de captura de Wireshark sí son BPF (idénticos a tcpdump). Los de visualización de Wireshark son un lenguaje distinto y más rico.</a:t>
+            </a:r>
+          </a:p>
+          <a:p>
+            <a:pPr>
+              <a:spcAft>
+                <a:spcPts val="600"/>
+              </a:spcAft>
+            </a:pPr>
+            <a:r>
+              <a:rPr sz="1500">
+                <a:solidFill>
+                  <a:srgbClr val="22282E"/>
+                </a:solidFill>
+              </a:rPr>
+              <a:t>•  ❓ ¿Cómo capturo sin que la captura afecte el rendimiento del servidor?</a:t>
+            </a:r>
+          </a:p>
+        </p:txBody>
+      </p:sp>
+    </p:spTree>
+  </p:cSld>
+  <p:clrMapOvr>
+    <a:masterClrMapping/>
+  </p:clrMapOvr>
+</p:sld>
+</file>
+
+<file path=ppt/slides/slide14.xml><?xml version="1.0" encoding="utf-8"?>
+<p:sld xmlns:a="http://schemas.openxmlformats.org/drawingml/2006/main" xmlns:p="http://schemas.openxmlformats.org/presentationml/2006/main" xmlns:r="http://schemas.openxmlformats.org/officeDocument/2006/relationships">
+  <p:cSld>
+    <p:spTree>
+      <p:nvGrpSpPr>
+        <p:cNvPr id="1" name=""/>
+        <p:cNvGrpSpPr/>
+        <p:nvPr/>
+      </p:nvGrpSpPr>
+      <p:grpSpPr/>
+      <p:sp>
+        <p:nvSpPr>
+          <p:cNvPr id="2" name="TextBox 1"/>
+          <p:cNvSpPr txBox="1"/>
+          <p:nvPr/>
+        </p:nvSpPr>
+        <p:spPr>
+          <a:xfrm>
+            <a:off x="457200" y="320040"/>
+            <a:ext cx="8229600" cy="822960"/>
+          </a:xfrm>
+          <a:prstGeom prst="rect">
+            <a:avLst/>
+          </a:prstGeom>
+          <a:noFill/>
+        </p:spPr>
+        <p:txBody>
+          <a:bodyPr wrap="square">
+            <a:spAutoFit/>
+          </a:bodyPr>
+          <a:lstStyle/>
+          <a:p>
+            <a:r>
+              <a:rPr sz="2600" b="1">
+                <a:solidFill>
+                  <a:srgbClr val="0B3D2E"/>
+                </a:solidFill>
+              </a:rPr>
+              <a:t>🔗 Referencias</a:t>
+            </a:r>
+          </a:p>
+        </p:txBody>
+      </p:sp>
+      <p:sp>
+        <p:nvSpPr>
+          <p:cNvPr id="3" name="TextBox 2"/>
+          <p:cNvSpPr txBox="1"/>
+          <p:nvPr/>
+        </p:nvSpPr>
+        <p:spPr>
+          <a:xfrm>
+            <a:off x="457200" y="1280160"/>
+            <a:ext cx="8229600" cy="4937760"/>
+          </a:xfrm>
+          <a:prstGeom prst="rect">
+            <a:avLst/>
+          </a:prstGeom>
+          <a:noFill/>
+        </p:spPr>
+        <p:txBody>
+          <a:bodyPr wrap="square">
+            <a:spAutoFit/>
+          </a:bodyPr>
+          <a:lstStyle/>
+          <a:p>
+            <a:pPr>
+              <a:spcAft>
+                <a:spcPts val="600"/>
+              </a:spcAft>
+            </a:pPr>
+            <a:r>
+              <a:rPr sz="1500">
+                <a:solidFill>
+                  <a:srgbClr val="22282E"/>
+                </a:solidFill>
+              </a:rPr>
               <a:t>•  tcpdump man page y ejemplos. &lt;https://www.tcpdump.org/manpages/tcpdump.1.html&gt;</a:t>
             </a:r>
           </a:p>
@@ -3629,6 +3900,81 @@
           </a:p>
         </p:txBody>
       </p:sp>
+    </p:spTree>
+  </p:cSld>
+  <p:clrMapOvr>
+    <a:masterClrMapping/>
+  </p:clrMapOvr>
+</p:sld>
+</file>
+
+<file path=ppt/slides/slide15.xml><?xml version="1.0" encoding="utf-8"?>
+<p:sld xmlns:a="http://schemas.openxmlformats.org/drawingml/2006/main" xmlns:p="http://schemas.openxmlformats.org/presentationml/2006/main" xmlns:r="http://schemas.openxmlformats.org/officeDocument/2006/relationships">
+  <p:cSld>
+    <p:spTree>
+      <p:nvGrpSpPr>
+        <p:cNvPr id="1" name=""/>
+        <p:cNvGrpSpPr/>
+        <p:nvPr/>
+      </p:nvGrpSpPr>
+      <p:grpSpPr/>
+      <p:sp>
+        <p:nvSpPr>
+          <p:cNvPr id="2" name="TextBox 1"/>
+          <p:cNvSpPr txBox="1"/>
+          <p:nvPr/>
+        </p:nvSpPr>
+        <p:spPr>
+          <a:xfrm>
+            <a:off x="457200" y="274320"/>
+            <a:ext cx="8229600" cy="640080"/>
+          </a:xfrm>
+          <a:prstGeom prst="rect">
+            <a:avLst/>
+          </a:prstGeom>
+          <a:noFill/>
+        </p:spPr>
+        <p:txBody>
+          <a:bodyPr wrap="square">
+            <a:spAutoFit/>
+          </a:bodyPr>
+          <a:lstStyle/>
+          <a:p>
+            <a:r>
+              <a:rPr sz="2200" b="1">
+                <a:solidFill>
+                  <a:srgbClr val="0B3D2E"/>
+                </a:solidFill>
+              </a:rPr>
+              <a:t>Diagrama de la clase</a:t>
+            </a:r>
+          </a:p>
+        </p:txBody>
+      </p:sp>
+      <p:pic>
+        <p:nvPicPr>
+          <p:cNvPr id="3" name="Picture 2" descr="ae25474cde25ae4f.png"/>
+          <p:cNvPicPr>
+            <a:picLocks noChangeAspect="1"/>
+          </p:cNvPicPr>
+          <p:nvPr/>
+        </p:nvPicPr>
+        <p:blipFill>
+          <a:blip r:embed="rId2"/>
+          <a:stretch>
+            <a:fillRect/>
+          </a:stretch>
+        </p:blipFill>
+        <p:spPr>
+          <a:xfrm>
+            <a:off x="457200" y="2871216"/>
+            <a:ext cx="8229600" cy="1755648"/>
+          </a:xfrm>
+          <a:prstGeom prst="rect">
+            <a:avLst/>
+          </a:prstGeom>
+        </p:spPr>
+      </p:pic>
     </p:spTree>
   </p:cSld>
   <p:clrMapOvr>
@@ -3713,7 +4059,7 @@
                   <a:srgbClr val="22282E"/>
                 </a:solidFill>
               </a:rPr>
-              <a:t>•  Capturar y filtrar tráfico desde la terminal con tcpdump, la herramienta imprescindible cuando no hay entorno gráfico (servidores, contenedores, dispositivos remotos por SSH). El alumno aprenderá la sintaxis BPF, la rotación de archivos y el flujo de trabajo "capturar en el servidor, analizar en Wireshark".</a:t>
+              <a:t>•  Capturar y filtrar tráfico desde la terminal con tcpdump, la herramienta imprescindible cuando no hay entorno gráfico (servidores, contenedores, dispositivos remotos por SSH). El alumno aprenderá la…</a:t>
             </a:r>
           </a:p>
         </p:txBody>
@@ -4122,7 +4468,7 @@
                   <a:srgbClr val="0B3D2E"/>
                 </a:solidFill>
               </a:rPr>
-              <a:t>📖 Definiciones y características</a:t>
+              <a:t>🧠 Explicación en profundidad</a:t>
             </a:r>
           </a:p>
         </p:txBody>
@@ -4160,67 +4506,97 @@
                   <a:srgbClr val="22282E"/>
                 </a:solidFill>
               </a:rPr>
-              <a:t>•  BPF (Berkeley Packet Filter): lenguaje de filtrado compilado en kernel; muy eficiente porque descarta paquetes antes de copiarlos a espacio de usuario.</a:t>
-            </a:r>
-          </a:p>
-          <a:p>
-            <a:pPr>
-              <a:spcAft>
-                <a:spcPts val="600"/>
-              </a:spcAft>
-            </a:pPr>
-            <a:r>
-              <a:rPr sz="1500">
-                <a:solidFill>
-                  <a:srgbClr val="22282E"/>
-                </a:solidFill>
-              </a:rPr>
-              <a:t>•  Snap length (-s): bytes capturados por paquete. -s 0 (o el valor por defecto moderno) captura el paquete completo.</a:t>
-            </a:r>
-          </a:p>
-          <a:p>
-            <a:pPr>
-              <a:spcAft>
-                <a:spcPts val="600"/>
-              </a:spcAft>
-            </a:pPr>
-            <a:r>
-              <a:rPr sz="1500">
-                <a:solidFill>
-                  <a:srgbClr val="22282E"/>
-                </a:solidFill>
-              </a:rPr>
-              <a:t>•  Ring buffer: conjunto rotatorio de archivos (-C tamaño, -W número) que evita llenar el disco.</a:t>
-            </a:r>
-          </a:p>
-          <a:p>
-            <a:pPr>
-              <a:spcAft>
-                <a:spcPts val="600"/>
-              </a:spcAft>
-            </a:pPr>
-            <a:r>
-              <a:rPr sz="1500">
-                <a:solidFill>
-                  <a:srgbClr val="22282E"/>
-                </a:solidFill>
-              </a:rPr>
-              <a:t>•  Primitiva BPF: unidad básica del filtro: host, net, port, tcp, udp, src, dst.</a:t>
-            </a:r>
-          </a:p>
-          <a:p>
-            <a:pPr>
-              <a:spcAft>
-                <a:spcPts val="600"/>
-              </a:spcAft>
-            </a:pPr>
-            <a:r>
-              <a:rPr sz="1500">
-                <a:solidFill>
-                  <a:srgbClr val="22282E"/>
-                </a:solidFill>
-              </a:rPr>
-              <a:t>•  -n: desactiva resolución DNS/puertos; acelera y evita generar tráfico extra durante la captura.</a:t>
+              <a:t>•  Wireshark es insuperable para entender una captura; tcpdump es lo que usas cuando</a:t>
+            </a:r>
+          </a:p>
+          <a:p>
+            <a:pPr>
+              <a:spcAft>
+                <a:spcPts val="600"/>
+              </a:spcAft>
+            </a:pPr>
+            <a:r>
+              <a:rPr sz="1500">
+                <a:solidFill>
+                  <a:srgbClr val="22282E"/>
+                </a:solidFill>
+              </a:rPr>
+              <a:t>•  tienes que capturar en un servidor sin entorno gráfico, dejar corriendo una captura</a:t>
+            </a:r>
+          </a:p>
+          <a:p>
+            <a:pPr>
+              <a:spcAft>
+                <a:spcPts val="600"/>
+              </a:spcAft>
+            </a:pPr>
+            <a:r>
+              <a:rPr sz="1500">
+                <a:solidFill>
+                  <a:srgbClr val="22282E"/>
+                </a:solidFill>
+              </a:rPr>
+              <a:t>•  durante días, o meter la captura dentro de un script. Es además la herramienta que casi</a:t>
+            </a:r>
+          </a:p>
+          <a:p>
+            <a:pPr>
+              <a:spcAft>
+                <a:spcPts val="600"/>
+              </a:spcAft>
+            </a:pPr>
+            <a:r>
+              <a:rPr sz="1500">
+                <a:solidFill>
+                  <a:srgbClr val="22282E"/>
+                </a:solidFill>
+              </a:rPr>
+              <a:t>•  con seguridad ya está instalada en la máquina comprometida que estás investigando, y la</a:t>
+            </a:r>
+          </a:p>
+          <a:p>
+            <a:pPr>
+              <a:spcAft>
+                <a:spcPts val="600"/>
+              </a:spcAft>
+            </a:pPr>
+            <a:r>
+              <a:rPr sz="1500">
+                <a:solidFill>
+                  <a:srgbClr val="22282E"/>
+                </a:solidFill>
+              </a:rPr>
+              <a:t>•  que consume menos recursos en el equipo que estás observando.</a:t>
+            </a:r>
+          </a:p>
+          <a:p>
+            <a:pPr>
+              <a:spcAft>
+                <a:spcPts val="600"/>
+              </a:spcAft>
+            </a:pPr>
+            <a:r>
+              <a:rPr sz="1500">
+                <a:solidFill>
+                  <a:srgbClr val="22282E"/>
+                </a:solidFill>
+              </a:rPr>
+              <a:t>•  Los dos parámetros que más consecuencias tienen son los menos vistosos. El snap</a:t>
+            </a:r>
+          </a:p>
+          <a:p>
+            <a:pPr>
+              <a:spcAft>
+                <a:spcPts val="600"/>
+              </a:spcAft>
+            </a:pPr>
+            <a:r>
+              <a:rPr sz="1500">
+                <a:solidFill>
+                  <a:srgbClr val="22282E"/>
+                </a:solidFill>
+              </a:rPr>
+              <a:t>•  length (-s) fija cuántos bytes se guardan de cada paquete: en versiones modernas el</a:t>
             </a:r>
           </a:p>
         </p:txBody>
@@ -4271,7 +4647,7 @@
                   <a:srgbClr val="0B3D2E"/>
                 </a:solidFill>
               </a:rPr>
-              <a:t>🧰 Herramientas y preparación</a:t>
+              <a:t>📖 Definiciones y características</a:t>
             </a:r>
           </a:p>
         </p:txBody>
@@ -4309,37 +4685,67 @@
                   <a:srgbClr val="22282E"/>
                 </a:solidFill>
               </a:rPr>
-              <a:t>•  tcpdump (Linux/macOS/BSD): sudo apt install tcpdump o viene preinstalado.</a:t>
-            </a:r>
-          </a:p>
-          <a:p>
-            <a:pPr>
-              <a:spcAft>
-                <a:spcPts val="600"/>
-              </a:spcAft>
-            </a:pPr>
-            <a:r>
-              <a:rPr sz="1500">
-                <a:solidFill>
-                  <a:srgbClr val="22282E"/>
-                </a:solidFill>
-              </a:rPr>
-              <a:t>•  Requiere privilegios para capturar: sudo o capacidad CAPNETRAW (sudo setcap capnetraw+ep $(which tcpdump)).</a:t>
-            </a:r>
-          </a:p>
-          <a:p>
-            <a:pPr>
-              <a:spcAft>
-                <a:spcPts val="600"/>
-              </a:spcAft>
-            </a:pPr>
-            <a:r>
-              <a:rPr sz="1500">
-                <a:solidFill>
-                  <a:srgbClr val="22282E"/>
-                </a:solidFill>
-              </a:rPr>
-              <a:t>•  Para analizar después: Wireshark o tshark.</a:t>
+              <a:t>•  BPF (Berkeley Packet Filter): lenguaje de filtrado compilado en kernel; muy eficiente porque descarta paquetes antes de copiarlos a espacio de usuario.</a:t>
+            </a:r>
+          </a:p>
+          <a:p>
+            <a:pPr>
+              <a:spcAft>
+                <a:spcPts val="600"/>
+              </a:spcAft>
+            </a:pPr>
+            <a:r>
+              <a:rPr sz="1500">
+                <a:solidFill>
+                  <a:srgbClr val="22282E"/>
+                </a:solidFill>
+              </a:rPr>
+              <a:t>•  Snap length (-s): bytes capturados por paquete. -s 0 (o el valor por defecto moderno) captura el paquete completo.</a:t>
+            </a:r>
+          </a:p>
+          <a:p>
+            <a:pPr>
+              <a:spcAft>
+                <a:spcPts val="600"/>
+              </a:spcAft>
+            </a:pPr>
+            <a:r>
+              <a:rPr sz="1500">
+                <a:solidFill>
+                  <a:srgbClr val="22282E"/>
+                </a:solidFill>
+              </a:rPr>
+              <a:t>•  Ring buffer: conjunto rotatorio de archivos (-C tamaño, -W número) que evita llenar el disco.</a:t>
+            </a:r>
+          </a:p>
+          <a:p>
+            <a:pPr>
+              <a:spcAft>
+                <a:spcPts val="600"/>
+              </a:spcAft>
+            </a:pPr>
+            <a:r>
+              <a:rPr sz="1500">
+                <a:solidFill>
+                  <a:srgbClr val="22282E"/>
+                </a:solidFill>
+              </a:rPr>
+              <a:t>•  Primitiva BPF: unidad básica del filtro: host, net, port, tcp, udp, src, dst.</a:t>
+            </a:r>
+          </a:p>
+          <a:p>
+            <a:pPr>
+              <a:spcAft>
+                <a:spcPts val="600"/>
+              </a:spcAft>
+            </a:pPr>
+            <a:r>
+              <a:rPr sz="1500">
+                <a:solidFill>
+                  <a:srgbClr val="22282E"/>
+                </a:solidFill>
+              </a:rPr>
+              <a:t>•  -n: desactiva resolución DNS/puertos; acelera y evita generar tráfico extra durante la captura.</a:t>
             </a:r>
           </a:p>
         </p:txBody>
@@ -4390,7 +4796,7 @@
                   <a:srgbClr val="0B3D2E"/>
                 </a:solidFill>
               </a:rPr>
-              <a:t>🧪 Laboratorio guiado</a:t>
+              <a:t>📔 Glosario</a:t>
             </a:r>
           </a:p>
         </p:txBody>
@@ -4428,97 +4834,97 @@
                   <a:srgbClr val="22282E"/>
                 </a:solidFill>
               </a:rPr>
-              <a:t>•  Lista interfaces disponibles:</a:t>
-            </a:r>
-          </a:p>
-          <a:p>
-            <a:pPr>
-              <a:spcAft>
-                <a:spcPts val="600"/>
-              </a:spcAft>
-            </a:pPr>
-            <a:r>
-              <a:rPr sz="1500">
-                <a:solidFill>
-                  <a:srgbClr val="22282E"/>
-                </a:solidFill>
-              </a:rPr>
-              <a:t>•  sudo tcpdump -D</a:t>
-            </a:r>
-          </a:p>
-          <a:p>
-            <a:pPr>
-              <a:spcAft>
-                <a:spcPts val="600"/>
-              </a:spcAft>
-            </a:pPr>
-            <a:r>
-              <a:rPr sz="1500">
-                <a:solidFill>
-                  <a:srgbClr val="22282E"/>
-                </a:solidFill>
-              </a:rPr>
-              <a:t>•  Captura básica sin resolución de nombres:</a:t>
-            </a:r>
-          </a:p>
-          <a:p>
-            <a:pPr>
-              <a:spcAft>
-                <a:spcPts val="600"/>
-              </a:spcAft>
-            </a:pPr>
-            <a:r>
-              <a:rPr sz="1500">
-                <a:solidFill>
-                  <a:srgbClr val="22282E"/>
-                </a:solidFill>
-              </a:rPr>
-              <a:t>•  sudo tcpdump -i eth0 -n</a:t>
-            </a:r>
-          </a:p>
-          <a:p>
-            <a:pPr>
-              <a:spcAft>
-                <a:spcPts val="600"/>
-              </a:spcAft>
-            </a:pPr>
-            <a:r>
-              <a:rPr sz="1500">
-                <a:solidFill>
-                  <a:srgbClr val="22282E"/>
-                </a:solidFill>
-              </a:rPr>
-              <a:t>•  Filtra por host y puerto:</a:t>
-            </a:r>
-          </a:p>
-          <a:p>
-            <a:pPr>
-              <a:spcAft>
-                <a:spcPts val="600"/>
-              </a:spcAft>
-            </a:pPr>
-            <a:r>
-              <a:rPr sz="1500">
-                <a:solidFill>
-                  <a:srgbClr val="22282E"/>
-                </a:solidFill>
-              </a:rPr>
-              <a:t>•  sudo tcpdump -i eth0 -n host 192.168.56.101 and tcp port 80</a:t>
-            </a:r>
-          </a:p>
-          <a:p>
-            <a:pPr>
-              <a:spcAft>
-                <a:spcPts val="600"/>
-              </a:spcAft>
-            </a:pPr>
-            <a:r>
-              <a:rPr sz="1500">
-                <a:solidFill>
-                  <a:srgbClr val="22282E"/>
-                </a:solidFill>
-              </a:rPr>
-              <a:t>•  Captura solo paquetes SYN (inicio de conexión) usando el offset de flags:</a:t>
+              <a:t>•  Término — Definición concisa</a:t>
+            </a:r>
+          </a:p>
+          <a:p>
+            <a:pPr>
+              <a:spcAft>
+                <a:spcPts val="600"/>
+              </a:spcAft>
+            </a:pPr>
+            <a:r>
+              <a:rPr sz="1500">
+                <a:solidFill>
+                  <a:srgbClr val="22282E"/>
+                </a:solidFill>
+              </a:rPr>
+              <a:t>•  tcpdump — Capturador de paquetes en línea de comandos, basado en libpcap</a:t>
+            </a:r>
+          </a:p>
+          <a:p>
+            <a:pPr>
+              <a:spcAft>
+                <a:spcPts val="600"/>
+              </a:spcAft>
+            </a:pPr>
+            <a:r>
+              <a:rPr sz="1500">
+                <a:solidFill>
+                  <a:srgbClr val="22282E"/>
+                </a:solidFill>
+              </a:rPr>
+              <a:t>•  BPF — Lenguaje de filtrado compilado y ejecutado en el kernel</a:t>
+            </a:r>
+          </a:p>
+          <a:p>
+            <a:pPr>
+              <a:spcAft>
+                <a:spcPts val="600"/>
+              </a:spcAft>
+            </a:pPr>
+            <a:r>
+              <a:rPr sz="1500">
+                <a:solidFill>
+                  <a:srgbClr val="22282E"/>
+                </a:solidFill>
+              </a:rPr>
+              <a:t>•  Primitiva BPF — Pieza del filtro: tipo (host), dirección (src) o protocolo (tcp)</a:t>
+            </a:r>
+          </a:p>
+          <a:p>
+            <a:pPr>
+              <a:spcAft>
+                <a:spcPts val="600"/>
+              </a:spcAft>
+            </a:pPr>
+            <a:r>
+              <a:rPr sz="1500">
+                <a:solidFill>
+                  <a:srgbClr val="22282E"/>
+                </a:solidFill>
+              </a:rPr>
+              <a:t>•  proto[off:len] — Acceso directo a bytes de una cabecera dentro del filtro</a:t>
+            </a:r>
+          </a:p>
+          <a:p>
+            <a:pPr>
+              <a:spcAft>
+                <a:spcPts val="600"/>
+              </a:spcAft>
+            </a:pPr>
+            <a:r>
+              <a:rPr sz="1500">
+                <a:solidFill>
+                  <a:srgbClr val="22282E"/>
+                </a:solidFill>
+              </a:rPr>
+              <a:t>•  Snap length (-s) — Bytes que se guardan de cada paquete</a:t>
+            </a:r>
+          </a:p>
+          <a:p>
+            <a:pPr>
+              <a:spcAft>
+                <a:spcPts val="600"/>
+              </a:spcAft>
+            </a:pPr>
+            <a:r>
+              <a:rPr sz="1500">
+                <a:solidFill>
+                  <a:srgbClr val="22282E"/>
+                </a:solidFill>
+              </a:rPr>
+              <a:t>•  -p — Desactiva el modo promiscuo (captura solo lo dirigido al host)</a:t>
             </a:r>
           </a:p>
         </p:txBody>
@@ -4569,7 +4975,7 @@
                   <a:srgbClr val="0B3D2E"/>
                 </a:solidFill>
               </a:rPr>
-              <a:t>✍️ Ejercicios</a:t>
+              <a:t>🧰 Herramientas y preparación</a:t>
             </a:r>
           </a:p>
         </p:txBody>
@@ -4607,82 +5013,37 @@
                   <a:srgbClr val="22282E"/>
                 </a:solidFill>
               </a:rPr>
-              <a:t>•  Captura solo tráfico ICMP entre dos hosts de tu laboratorio y guárdalo en icmp.pcap.</a:t>
-            </a:r>
-          </a:p>
-          <a:p>
-            <a:pPr>
-              <a:spcAft>
-                <a:spcPts val="600"/>
-              </a:spcAft>
-            </a:pPr>
-            <a:r>
-              <a:rPr sz="1500">
-                <a:solidFill>
-                  <a:srgbClr val="22282E"/>
-                </a:solidFill>
-              </a:rPr>
-              <a:t>•  Escribe un filtro que capture tráfico HTTP y HTTPS (port 80 or port 443).</a:t>
-            </a:r>
-          </a:p>
-          <a:p>
-            <a:pPr>
-              <a:spcAft>
-                <a:spcPts val="600"/>
-              </a:spcAft>
-            </a:pPr>
-            <a:r>
-              <a:rPr sz="1500">
-                <a:solidFill>
-                  <a:srgbClr val="22282E"/>
-                </a:solidFill>
-              </a:rPr>
-              <a:t>•  Captura paquetes con el flag RST activo e interpreta qué conexiones se rechazan.</a:t>
-            </a:r>
-          </a:p>
-          <a:p>
-            <a:pPr>
-              <a:spcAft>
-                <a:spcPts val="600"/>
-              </a:spcAft>
-            </a:pPr>
-            <a:r>
-              <a:rPr sz="1500">
-                <a:solidFill>
-                  <a:srgbClr val="22282E"/>
-                </a:solidFill>
-              </a:rPr>
-              <a:t>•  Usa -c 100 para limitar la captura a 100 paquetes y explica cuándo conviene.</a:t>
-            </a:r>
-          </a:p>
-          <a:p>
-            <a:pPr>
-              <a:spcAft>
-                <a:spcPts val="600"/>
-              </a:spcAft>
-            </a:pPr>
-            <a:r>
-              <a:rPr sz="1500">
-                <a:solidFill>
-                  <a:srgbClr val="22282E"/>
-                </a:solidFill>
-              </a:rPr>
-              <a:t>•  Rota capturas cada 60 segundos con -G 60 y nómbralas con %Y%m%d-%H%M%S.</a:t>
-            </a:r>
-          </a:p>
-          <a:p>
-            <a:pPr>
-              <a:spcAft>
-                <a:spcPts val="600"/>
-              </a:spcAft>
-            </a:pPr>
-            <a:r>
-              <a:rPr sz="1500">
-                <a:solidFill>
-                  <a:srgbClr val="22282E"/>
-                </a:solidFill>
-              </a:rPr>
-              <a:t>•  Convierte tu .pcap a .pcapng con editcap y ábrelo en Wireshark.</a:t>
+              <a:t>•  tcpdump (Linux/macOS/BSD): sudo apt install tcpdump o viene preinstalado.</a:t>
+            </a:r>
+          </a:p>
+          <a:p>
+            <a:pPr>
+              <a:spcAft>
+                <a:spcPts val="600"/>
+              </a:spcAft>
+            </a:pPr>
+            <a:r>
+              <a:rPr sz="1500">
+                <a:solidFill>
+                  <a:srgbClr val="22282E"/>
+                </a:solidFill>
+              </a:rPr>
+              <a:t>•  Requiere privilegios para capturar: sudo o capacidad CAPNETRAW (sudo setcap capnetraw+ep $(which tcpdump)).</a:t>
+            </a:r>
+          </a:p>
+          <a:p>
+            <a:pPr>
+              <a:spcAft>
+                <a:spcPts val="600"/>
+              </a:spcAft>
+            </a:pPr>
+            <a:r>
+              <a:rPr sz="1500">
+                <a:solidFill>
+                  <a:srgbClr val="22282E"/>
+                </a:solidFill>
+              </a:rPr>
+              <a:t>•  Para analizar después: Wireshark o tshark.</a:t>
             </a:r>
           </a:p>
         </p:txBody>
@@ -4733,7 +5094,7 @@
                   <a:srgbClr val="0B3D2E"/>
                 </a:solidFill>
               </a:rPr>
-              <a:t>📝 Reto verificable</a:t>
+              <a:t>🧪 Laboratorio guiado</a:t>
             </a:r>
           </a:p>
         </p:txBody>
@@ -4771,22 +5132,97 @@
                   <a:srgbClr val="22282E"/>
                 </a:solidFill>
               </a:rPr>
-              <a:t>•  Desde un servidor de laboratorio (o VM) sin entorno gráfico, captura durante 30 segundos todo el tráfico excepto tu sesión SSH, guárdalo con rotación en archivos de 5 MB, y entrega el primer archivo junto con el comando exacto usado. Documenta cuántos paquetes contiene según tcpdump -r archivo -n | wc -l.</a:t>
-            </a:r>
-          </a:p>
-          <a:p>
-            <a:pPr>
-              <a:spcAft>
-                <a:spcPts val="600"/>
-              </a:spcAft>
-            </a:pPr>
-            <a:r>
-              <a:rPr sz="1500">
-                <a:solidFill>
-                  <a:srgbClr val="22282E"/>
-                </a:solidFill>
-              </a:rPr>
-              <a:t>•  Criterio de aceptación: el archivo abre sin errores en Wireshark, no contiene tráfico del puerto 22 hacia/desde tu IP, y el conteo declarado coincide con el del revisor.</a:t>
+              <a:t>•  Lista interfaces disponibles:</a:t>
+            </a:r>
+          </a:p>
+          <a:p>
+            <a:pPr>
+              <a:spcAft>
+                <a:spcPts val="600"/>
+              </a:spcAft>
+            </a:pPr>
+            <a:r>
+              <a:rPr sz="1500">
+                <a:solidFill>
+                  <a:srgbClr val="22282E"/>
+                </a:solidFill>
+              </a:rPr>
+              <a:t>•  Captura básica sin resolución de nombres:</a:t>
+            </a:r>
+          </a:p>
+          <a:p>
+            <a:pPr>
+              <a:spcAft>
+                <a:spcPts val="600"/>
+              </a:spcAft>
+            </a:pPr>
+            <a:r>
+              <a:rPr sz="1500">
+                <a:solidFill>
+                  <a:srgbClr val="22282E"/>
+                </a:solidFill>
+              </a:rPr>
+              <a:t>•  Filtra por host y puerto:</a:t>
+            </a:r>
+          </a:p>
+          <a:p>
+            <a:pPr>
+              <a:spcAft>
+                <a:spcPts val="600"/>
+              </a:spcAft>
+            </a:pPr>
+            <a:r>
+              <a:rPr sz="1500">
+                <a:solidFill>
+                  <a:srgbClr val="22282E"/>
+                </a:solidFill>
+              </a:rPr>
+              <a:t>•  Captura solo paquetes SYN (inicio de conexión) usando el offset de flags:</a:t>
+            </a:r>
+          </a:p>
+          <a:p>
+            <a:pPr>
+              <a:spcAft>
+                <a:spcPts val="600"/>
+              </a:spcAft>
+            </a:pPr>
+            <a:r>
+              <a:rPr sz="1500">
+                <a:solidFill>
+                  <a:srgbClr val="22282E"/>
+                </a:solidFill>
+              </a:rPr>
+              <a:t>•  Guarda a archivo con snap completo:</a:t>
+            </a:r>
+          </a:p>
+          <a:p>
+            <a:pPr>
+              <a:spcAft>
+                <a:spcPts val="600"/>
+              </a:spcAft>
+            </a:pPr>
+            <a:r>
+              <a:rPr sz="1500">
+                <a:solidFill>
+                  <a:srgbClr val="22282E"/>
+                </a:solidFill>
+              </a:rPr>
+              <a:t>•  Genera tráfico DNS en otra terminal (dig example.com) y detén con Ctrl-C.</a:t>
+            </a:r>
+          </a:p>
+          <a:p>
+            <a:pPr>
+              <a:spcAft>
+                <a:spcPts val="600"/>
+              </a:spcAft>
+            </a:pPr>
+            <a:r>
+              <a:rPr sz="1500">
+                <a:solidFill>
+                  <a:srgbClr val="22282E"/>
+                </a:solidFill>
+              </a:rPr>
+              <a:t>•  Lee lo capturado con filtro de lectura:</a:t>
             </a:r>
           </a:p>
         </p:txBody>
